--- a/Planning docs/Slides/lesson-20-2-teacher-slides.pptx
+++ b/Planning docs/Slides/lesson-20-2-teacher-slides.pptx
@@ -5130,7 +5130,7 @@
                 <a:ea typeface="Calibri" pitchFamily="34" charset="-122"/>
                 <a:cs typeface="Calibri" pitchFamily="34" charset="-120"/>
               </a:rPr>
-              <a:t>•  Good readers look for clues in what characters say AND how they say it. When two characters argue, both sides have a point. Look for both.</a:t>
+              <a:t>•  In Chapter 13, Jemmy escapes through the forest. What does the bear do, and how does it accidentally help Jemmy?</a:t>
             </a:r>
             <a:endParaRPr lang="en-US" sz="1500" dirty="0"/>
           </a:p>
@@ -5147,24 +5147,7 @@
                 <a:ea typeface="Calibri" pitchFamily="34" charset="-122"/>
                 <a:cs typeface="Calibri" pitchFamily="34" charset="-120"/>
               </a:rPr>
-              <a:t>•  Give two reasons this is not a haiku.</a:t>
-            </a:r>
-            <a:endParaRPr lang="en-US" sz="1500" dirty="0"/>
-          </a:p>
-          <a:p>
-            <a:pPr indent="0" marL="0">
-              <a:buNone/>
-            </a:pPr>
-            <a:r>
-              <a:rPr lang="en-US" sz="1500" dirty="0">
-                <a:solidFill>
-                  <a:srgbClr val="1E293B"/>
-                </a:solidFill>
-                <a:latin typeface="Calibri" pitchFamily="34" charset="0"/>
-                <a:ea typeface="Calibri" pitchFamily="34" charset="-122"/>
-                <a:cs typeface="Calibri" pitchFamily="34" charset="-120"/>
-              </a:rPr>
-              <a:t>•  Look at the letters around the dot in each word. Count: vowel, consonant, consonant, vowel. That's the VCCV pattern .</a:t>
+              <a:t>•  Jemmy confronts the prince for giving him away. Does the prince's response change anything for Jemmy?</a:t>
             </a:r>
             <a:endParaRPr lang="en-US" sz="1500" dirty="0"/>
           </a:p>
